--- a/walkthrough/JanVayu_Walkthrough.pptx
+++ b/walkthrough/JanVayu_Walkthrough.pptx
@@ -724,7 +724,7 @@
           <a:lstStyle/>
           <a:p>
             <a:r>
-              <a:t>Close the trust loop: the weekly automated fact-check. This is what lets us stand behind every number on stage.</a:t>
+              <a:t>Close the trust loop, and be exact about which half is which. Continuous: the build recomputes every stated figure from the data and fails on drift, and refuses any claim we have publicly retracted, translations included. Periodic: a deeper audit re-verifies statistics against primary sources, findings logged publicly. That deeper audit ran weekly through July 2026 and is not on a schedule now, which is why this deck no longer says weekly.</a:t>
             </a:r>
           </a:p>
         </p:txBody>

--- a/walkthrough/JanVayu_Walkthrough.pptx
+++ b/walkthrough/JanVayu_Walkthrough.pptx
@@ -1354,7 +1354,7 @@
           <a:lstStyle/>
           <a:p>
             <a:r>
-              <a:t>Accountability is the differentiator. NCAP/GRAP trackers, per-city budgets, one-click RTI. Cite the CREA figure: 27 of 96 cities met the target.</a:t>
+              <a:t>Accountability is the differentiator. NCAP/GRAP trackers, per-city budgets, one-click RTI. Cite the CREA figure: 23 of the 100 cities with sufficient PM10 data met the target.</a:t>
             </a:r>
           </a:p>
         </p:txBody>

--- a/walkthrough/JanVayu_Walkthrough.pptx
+++ b/walkthrough/JanVayu_Walkthrough.pptx
@@ -18,6 +18,7 @@
     <p:sldId id="266" r:id="rId18"/>
     <p:sldId id="267" r:id="rId19"/>
     <p:sldId id="268" r:id="rId20"/>
+    <p:sldId id="269" r:id="rId21"/>
   </p:sldIdLst>
   <p:sldSz cx="12192000" cy="6858000" type="screen4x3"/>
   <p:notesSz cx="6858000" cy="9144000"/>
@@ -4531,6 +4532,48 @@
       <p:pic>
         <p:nvPicPr>
           <p:cNvPr id="2" name="Picture 1" descr="slide-13.jpg"/>
+          <p:cNvPicPr>
+            <a:picLocks noChangeAspect="1"/>
+          </p:cNvPicPr>
+          <p:nvPr/>
+        </p:nvPicPr>
+        <p:blipFill>
+          <a:blip r:embed="rId2"/>
+          <a:stretch>
+            <a:fillRect/>
+          </a:stretch>
+        </p:blipFill>
+        <p:spPr>
+          <a:xfrm>
+            <a:off x="0" y="0"/>
+            <a:ext cx="12192000" cy="6858000"/>
+          </a:xfrm>
+          <a:prstGeom prst="rect">
+            <a:avLst/>
+          </a:prstGeom>
+        </p:spPr>
+      </p:pic>
+    </p:spTree>
+  </p:cSld>
+  <p:clrMapOvr>
+    <a:masterClrMapping/>
+  </p:clrMapOvr>
+</p:sld>
+</file>
+
+<file path=ppt/slides/slide14.xml><?xml version="1.0" encoding="utf-8"?>
+<p:sld xmlns:a="http://schemas.openxmlformats.org/drawingml/2006/main" xmlns:p="http://schemas.openxmlformats.org/presentationml/2006/main" xmlns:r="http://schemas.openxmlformats.org/officeDocument/2006/relationships">
+  <p:cSld>
+    <p:spTree>
+      <p:nvGrpSpPr>
+        <p:cNvPr id="1" name=""/>
+        <p:cNvGrpSpPr/>
+        <p:nvPr/>
+      </p:nvGrpSpPr>
+      <p:grpSpPr/>
+      <p:pic>
+        <p:nvPicPr>
+          <p:cNvPr id="2" name="Picture 1" descr="slide-14.jpg"/>
           <p:cNvPicPr>
             <a:picLocks noChangeAspect="1"/>
           </p:cNvPicPr>

--- a/walkthrough/JanVayu_Walkthrough.pptx
+++ b/walkthrough/JanVayu_Walkthrough.pptx
@@ -515,7 +515,7 @@
           <a:lstStyle/>
           <a:p>
             <a:r>
-              <a:t>Open warm. JanVayu means 'People's Air'. This is a public record of India's air-quality crisis — the data, the health toll, the money, and the tools — built for citizens, not experts.</a:t>
+              <a:t>Open warm. JanVayu means 'People's Air'. This is a public record of India's air-quality crisis: the data, the health toll, the money and the tools. It is built for citizens, not experts.</a:t>
             </a:r>
           </a:p>
         </p:txBody>
@@ -585,7 +585,7 @@
           <a:lstStyle/>
           <a:p>
             <a:r>
-              <a:t>A short teaching moment: the AQI reports only the worst of six pollutants, so the single number hides what's driving it. Good for journalists.</a:t>
+              <a:t>A short teaching moment: the AQI reports only the worst of several pollutants, so the single number hides what's driving it. Good for journalists.</a:t>
             </a:r>
           </a:p>
         </p:txBody>
@@ -725,7 +725,7 @@
           <a:lstStyle/>
           <a:p>
             <a:r>
-              <a:t>Close the trust loop, and be exact about which half is which. Continuous: the build recomputes every stated figure from the data and fails on drift, and refuses any claim we have publicly retracted, translations included. Periodic: a deeper audit re-verifies statistics against primary sources, findings logged publicly. That deeper audit ran weekly through July 2026 and is not on a schedule now, which is why this deck no longer says weekly.</a:t>
+              <a:t>Close the trust loop, and be exact about which half is which. Continuous: every stated figure is recomputed from the data whenever the site changes, a mismatch stops the release, and any claim we have publicly retracted is refused, translations included. Periodic: a deeper audit re-verifies statistics against primary sources, findings logged publicly. That deeper audit ran weekly through July 2026 and is not on a schedule now, which is why this deck no longer says weekly.</a:t>
             </a:r>
           </a:p>
         </p:txBody>
@@ -795,6 +795,76 @@
           <a:lstStyle/>
           <a:p>
             <a:r>
+              <a:t>The most quotable slide, so be precise about what it does and does not show. It removes weather as an explanation; it does not prove policy caused the rest. Emissions, fuel mix, construction and economic activity all sit inside what is left. 33 of the 44 cities are getting cleaner and 11 are not.</a:t>
+            </a:r>
+          </a:p>
+        </p:txBody>
+      </p:sp>
+      <p:sp>
+        <p:nvSpPr>
+          <p:cNvPr id="4" name="Slide Number Placeholder 3"/>
+          <p:cNvSpPr>
+            <a:spLocks noGrp="1"/>
+          </p:cNvSpPr>
+          <p:nvPr>
+            <p:ph type="sldNum" idx="5" sz="quarter"/>
+          </p:nvPr>
+        </p:nvSpPr>
+        <p:spPr/>
+      </p:sp>
+    </p:spTree>
+  </p:cSld>
+  <p:clrMapOvr>
+    <a:masterClrMapping/>
+  </p:clrMapOvr>
+</p:notes>
+</file>
+
+<file path=ppt/notesSlides/notesSlide14.xml><?xml version="1.0" encoding="utf-8"?>
+<p:notes xmlns:a="http://schemas.openxmlformats.org/drawingml/2006/main" xmlns:p="http://schemas.openxmlformats.org/presentationml/2006/main" xmlns:r="http://schemas.openxmlformats.org/officeDocument/2006/relationships">
+  <p:cSld>
+    <p:spTree>
+      <p:nvGrpSpPr>
+        <p:cNvPr id="1" name=""/>
+        <p:cNvGrpSpPr/>
+        <p:nvPr/>
+      </p:nvGrpSpPr>
+      <p:grpSpPr>
+        <a:xfrm>
+          <a:off x="0" y="0"/>
+          <a:ext cx="0" cy="0"/>
+          <a:chOff x="0" y="0"/>
+          <a:chExt cx="0" cy="0"/>
+        </a:xfrm>
+      </p:grpSpPr>
+      <p:sp>
+        <p:nvSpPr>
+          <p:cNvPr id="2" name="Slide Image Placeholder 1"/>
+          <p:cNvSpPr>
+            <a:spLocks noGrp="1"/>
+          </p:cNvSpPr>
+          <p:nvPr>
+            <p:ph type="sldImg" idx="2"/>
+          </p:nvPr>
+        </p:nvSpPr>
+        <p:spPr/>
+      </p:sp>
+      <p:sp>
+        <p:nvSpPr>
+          <p:cNvPr id="3" name="Notes Placeholder 2"/>
+          <p:cNvSpPr>
+            <a:spLocks noGrp="1"/>
+          </p:cNvSpPr>
+          <p:nvPr>
+            <p:ph type="body" idx="3" sz="quarter"/>
+          </p:nvPr>
+        </p:nvSpPr>
+        <p:spPr/>
+        <p:txBody>
+          <a:bodyPr/>
+          <a:lstStyle/>
+          <a:p>
+            <a:r>
               <a:t>Land the mission. Clean air is a right. Invite the audience to use the data and contribute. End on janvayu.in.</a:t>
             </a:r>
           </a:p>
@@ -865,7 +935,7 @@
           <a:lstStyle/>
           <a:p>
             <a:r>
-              <a:t>Lead with the human cost, sourced. 1.72M ambient PM2.5 deaths (Lancet Countdown 2025); counting household air pollution the total is ~2.1M (SoGA 2024). 3.5 years of life lost on average. This is year-round, not just a Delhi-winter story.</a:t>
+              <a:t>Lead with the human cost, sourced. 1.72M ambient PM2.5 deaths (Lancet Countdown 2025); State of Global Air 2024 counts about 2.1M deaths from all air pollution (ambient + household + ozone, 2021), a different method from the Lancet Countdown 2022 estimate. 3.5 years of life lost on average. The problem runs all year, not only in Delhi's winter.</a:t>
             </a:r>
           </a:p>
         </p:txBody>
@@ -935,7 +1005,7 @@
           <a:lstStyle/>
           <a:p>
             <a:r>
-              <a:t>Frame the stance: a record, not a campaign. Non-partisan, citizen-led, open source, and — crucially — fact-checked. That last point is the credibility anchor.</a:t>
+              <a:t>Frame the stance: a record, not a campaign. Non-partisan, citizen-led, open source and fact-checked. The fact-checking is what makes the rest credible.</a:t>
             </a:r>
           </a:p>
         </p:txBody>
@@ -1075,7 +1145,7 @@
           <a:lstStyle/>
           <a:p>
             <a:r>
-              <a:t>Show the live product. Lead with PM2.5 in µg/m³, not the AQI — AQI is a derived index and PM2.5 is the pollutant that does the damage. 157 cities, 10-minute refresh, station map, rankings, forecast, fire tracker. Emphasise source transparency — we explain why CPCB/WAQI/IQAir differ.</a:t>
+              <a:t>Show the live product. Lead with PM2.5 in µg/m³ rather than the AQI: the AQI is a derived index, and PM2.5 is the pollutant that does the damage. 157 Indian cities (33 refreshed every 10 minutes, the rest loaded when picked), station map, rankings, forecast, fire tracker. Stress source transparency: we explain why CPCB/WAQI/IQAir differ.</a:t>
             </a:r>
           </a:p>
         </p:txBody>
@@ -1285,7 +1355,7 @@
           <a:lstStyle/>
           <a:p>
             <a:r>
-              <a:t>The economic case — useful for policymakers. $36.8bn/yr on the narrower measure (1.36% GDP), up to $339bn (9.5%) broader. Clean air is economic policy.</a:t>
+              <a:t>The economic case, useful for policymakers. $36.8bn of lost output in 2019 (1.36% GDP; Pandey et al., Lancet Planetary Health 2021). Separately, the Lancet Countdown 2025 values 2022 premature deaths from outdoor PM2.5 at $339bn (9.5% of GDP); these are different methods and years, not a narrow and a broad version of one number. Clean air is economic policy.</a:t>
             </a:r>
           </a:p>
         </p:txBody>
@@ -1355,7 +1425,7 @@
           <a:lstStyle/>
           <a:p>
             <a:r>
-              <a:t>Accountability is the differentiator. NCAP/GRAP trackers, per-city budgets, one-click RTI. Cite the CREA figure: 23 of the 100 cities with sufficient PM10 data met the target.</a:t>
+              <a:t>Accountability is what sets JanVayu apart. NCAP/GRAP trackers, per-city budgets, one-click RTI. Cite the CREA figure: 23 of the 100 cities with sufficient PM10 data met the target.</a:t>
             </a:r>
           </a:p>
         </p:txBody>

--- a/walkthrough/JanVayu_Walkthrough.pptx
+++ b/walkthrough/JanVayu_Walkthrough.pptx
@@ -1005,7 +1005,7 @@
           <a:lstStyle/>
           <a:p>
             <a:r>
-              <a:t>Frame the stance: a record, not a campaign. Non-partisan, citizen-led, open source and fact-checked. The fact-checking is what makes the rest credible.</a:t>
+              <a:t>Frame the stance: a record, not a campaign. Citizen-led, open source and fact-checked, and say that it grew out of an AIPC campaign. The fact-checking is what makes the rest credible.</a:t>
             </a:r>
           </a:p>
         </p:txBody>
